--- a/pythonpra/myproject/ppt/assistant_devlog.pptx
+++ b/pythonpra/myproject/ppt/assistant_devlog.pptx
@@ -11677,7 +11677,7 @@
                 <a:ea typeface="Malgun Gothic" pitchFamily="34" charset="-122"/>
                 <a:cs typeface="Malgun Gothic" pitchFamily="34" charset="-120"/>
               </a:rPr>
-              <a:t>손바닥이 정면일 때만 클릭 판정. 이중 임계값과 0.1초 유지시간 추가.</a:t>
+              <a:t>손바닥이 정면일 때만 클릭 판정. 0.1초 이상 유지해야 인정.</a:t>
             </a:r>
             <a:endParaRPr lang="en-US" sz="1400" dirty="0"/>
           </a:p>
@@ -11766,7 +11766,7 @@
                 <a:ea typeface="Malgun Gothic" pitchFamily="34" charset="-122"/>
                 <a:cs typeface="Malgun Gothic" pitchFamily="34" charset="-120"/>
               </a:rPr>
-              <a:t>거리 영향은 정규화로 제거. 손날 판정은 0.28 미만에서 진입, 0.42 초과에서 해제(사이는 직전 상태 유지).</a:t>
+              <a:t>거리 영향은 정규화로 제거. 손날 판정은 들어가는 기준과 나오는 기준을 다르게 둬서 깜빡임을 막음.</a:t>
             </a:r>
             <a:endParaRPr lang="en-US" sz="1400" dirty="0"/>
           </a:p>

--- a/pythonpra/myproject/ppt/assistant_devlog.pptx
+++ b/pythonpra/myproject/ppt/assistant_devlog.pptx
@@ -954,7 +954,7 @@
           <a:p>
             <a:r>
               <a:rPr lang="en-US" dirty="0"/>
-              <a:t>[1:00 / 누적 1:20] 만든 이유를 먼저 말한다. 목표: 클릭과 예/아니오를 뺀 모든 동작을 사용자가 직접 정의. 수어 인식 프로젝트에서 MediaPipe 손 인식을 써 본 뒤 추가 활용법을 찾다가 시작. 오른쪽은 만든 순서를 한 번만 훑는다.</a:t>
+              <a:t>[1:00 / 누적 1:20] 만든 이유를 먼저 말한다. 목표: 클릭과 예/아니오를 뺀 모든 동작을 사용자가 직접 정의. MediaPipe 손 인식을 PC 조작에 활용할 방법을 찾다가 시작. 오른쪽은 만든 순서를 한 번만 훑는다.</a:t>
             </a:r>
             <a:endParaRPr lang="en-US" dirty="0"/>
           </a:p>
@@ -2054,7 +2054,7 @@
                 <a:ea typeface="Malgun Gothic" pitchFamily="34" charset="-122"/>
                 <a:cs typeface="Malgun Gothic" pitchFamily="34" charset="-120"/>
               </a:rPr>
-              <a:t>손동작 · 음성 · 포즈를 로컬 LLM으로 해석해서 PC를 제어한다</a:t>
+              <a:t>손동작 · 음성 · 포즈를 로컬 LLM으로 해석해 PC를 제어</a:t>
             </a:r>
             <a:endParaRPr lang="en-US" sz="1800" dirty="0"/>
           </a:p>
@@ -2422,7 +2422,7 @@
                 <a:ea typeface="Malgun Gothic" pitchFamily="34" charset="-122"/>
                 <a:cs typeface="Malgun Gothic" pitchFamily="34" charset="-120"/>
               </a:rPr>
-              <a:t>손을 떼면 녹음 종료. 소음 환경의 주력</a:t>
+              <a:t>손을 떼면 녹음 종료. 소음 환경에서 주로 사용</a:t>
             </a:r>
             <a:endParaRPr lang="en-US" sz="1400" dirty="0"/>
           </a:p>
@@ -2607,7 +2607,7 @@
                 <a:ea typeface="Malgun Gothic" pitchFamily="34" charset="-122"/>
                 <a:cs typeface="Malgun Gothic" pitchFamily="34" charset="-120"/>
               </a:rPr>
-              <a:t>Whisper는 받아쓰기만. 해석은 LLM이</a:t>
+              <a:t>Whisper는 받아쓰기만, 해석은 LLM이 담당</a:t>
             </a:r>
             <a:endParaRPr lang="en-US" sz="1400" dirty="0"/>
           </a:p>
@@ -2687,7 +2687,7 @@
                 <a:ea typeface="Malgun Gothic" pitchFamily="34" charset="-122"/>
                 <a:cs typeface="Malgun Gothic" pitchFamily="34" charset="-120"/>
               </a:rPr>
-              <a:t>음성 인식이 궁금해서 넣었다. 소음이 크지 않은 곳에서는 잘 인식한다.</a:t>
+              <a:t>음성 인식의 동작 방식을 알아보려는 목적. 소음이 크지 않은 곳에서는 잘 인식</a:t>
             </a:r>
             <a:endParaRPr lang="en-US" sz="1800" dirty="0"/>
           </a:p>
@@ -3430,7 +3430,7 @@
                 <a:ea typeface="Malgun Gothic" pitchFamily="34" charset="-122"/>
                 <a:cs typeface="Malgun Gothic" pitchFamily="34" charset="-120"/>
               </a:rPr>
-              <a:t>소리 감지가 약해서 인식이 안 된다</a:t>
+              <a:t>소리 감지가 약해 인식 불가</a:t>
             </a:r>
             <a:endParaRPr lang="en-US" sz="1400" dirty="0"/>
           </a:p>
@@ -3526,7 +3526,7 @@
                 <a:ea typeface="Malgun Gothic" pitchFamily="34" charset="-122"/>
                 <a:cs typeface="Malgun Gothic" pitchFamily="34" charset="-120"/>
               </a:rPr>
-              <a:t>신호는 이미 정상으로 잡히고 있었다</a:t>
+              <a:t>신호는 이미 정상 감지</a:t>
             </a:r>
             <a:endParaRPr lang="en-US" sz="1400" dirty="0"/>
           </a:p>
@@ -3615,7 +3615,7 @@
                 <a:ea typeface="Malgun Gothic" pitchFamily="34" charset="-122"/>
                 <a:cs typeface="Malgun Gothic" pitchFamily="34" charset="-120"/>
               </a:rPr>
-              <a:t>박수 신호(30ms)와 카메라 프레임(33ms)이 잘 안 겹침. 양손이 하나로 검출되기도 함</a:t>
+              <a:t>박수 신호(30ms)와 카메라 프레임(33ms)의 시점 불일치. 양손이 하나로 검출되는 경우도 발생</a:t>
             </a:r>
             <a:endParaRPr lang="en-US" sz="1400" dirty="0"/>
           </a:p>
@@ -3704,7 +3704,27 @@
                 <a:ea typeface="Malgun Gothic" pitchFamily="34" charset="-122"/>
                 <a:cs typeface="Malgun Gothic" pitchFamily="34" charset="-120"/>
               </a:rPr>
-              <a:t>직전 1초 안에 양손이 모였으면 인정</a:t>
+              <a:t>직전 1초 안에</a:t>
+            </a:r>
+            <a:endParaRPr lang="en-US" sz="1400" dirty="0"/>
+          </a:p>
+          <a:p>
+            <a:pPr indent="0" marL="0">
+              <a:spcAft>
+                <a:spcPts val="400"/>
+              </a:spcAft>
+              <a:buNone/>
+            </a:pPr>
+            <a:r>
+              <a:rPr lang="en-US" sz="1900" dirty="0">
+                <a:solidFill>
+                  <a:srgbClr val="1B2230"/>
+                </a:solidFill>
+                <a:latin typeface="Malgun Gothic" pitchFamily="34" charset="0"/>
+                <a:ea typeface="Malgun Gothic" pitchFamily="34" charset="-122"/>
+                <a:cs typeface="Malgun Gothic" pitchFamily="34" charset="-120"/>
+              </a:rPr>
+              <a:t>양손이 모였으면 인정</a:t>
             </a:r>
             <a:endParaRPr lang="en-US" sz="1400" dirty="0"/>
           </a:p>
@@ -3784,7 +3804,7 @@
                 <a:ea typeface="Malgun Gothic" pitchFamily="34" charset="-122"/>
                 <a:cs typeface="Malgun Gothic" pitchFamily="34" charset="-120"/>
               </a:rPr>
-              <a:t>양손 모으기 1초로 모드를 전환. 키보드 소리와 박수는 음량(peak)으로 구분.</a:t>
+              <a:t>양손 모으기 1초로 모드 전환. 키보드 소리와 박수는 음량(peak)으로 구분</a:t>
             </a:r>
             <a:endParaRPr lang="en-US" sz="1800" dirty="0"/>
           </a:p>
@@ -4649,7 +4669,7 @@
                 <a:ea typeface="Malgun Gothic" pitchFamily="34" charset="-122"/>
                 <a:cs typeface="Malgun Gothic" pitchFamily="34" charset="-120"/>
               </a:rPr>
-              <a:t>수어 인식 프로젝트의 손 인식에서 출발, 추가 활용법을 찾다가 비서로</a:t>
+              <a:t>MediaPipe 손 인식에서 출발, PC 조작 활용법을 찾다가 비서로</a:t>
             </a:r>
             <a:endParaRPr lang="en-US" sz="1500" dirty="0"/>
           </a:p>
@@ -11568,7 +11588,7 @@
                 <a:ea typeface="Malgun Gothic" pitchFamily="34" charset="-122"/>
                 <a:cs typeface="Malgun Gothic" pitchFamily="34" charset="-120"/>
               </a:rPr>
-              <a:t>원인</a:t>
+              <a:t>실패 원인</a:t>
             </a:r>
             <a:endParaRPr lang="en-US" sz="1400" dirty="0"/>
           </a:p>
@@ -11588,7 +11608,7 @@
                 <a:ea typeface="Malgun Gothic" pitchFamily="34" charset="-122"/>
                 <a:cs typeface="Malgun Gothic" pitchFamily="34" charset="-120"/>
               </a:rPr>
-              <a:t>로그로 확인. 손을 돌리면 2D 화면에서 손가락이 겹쳐 보인다.</a:t>
+              <a:t>손을 돌릴 때 2D 화면에서 손가락이 겹쳐 보이는 현상</a:t>
             </a:r>
             <a:endParaRPr lang="en-US" sz="1400" dirty="0"/>
           </a:p>
@@ -11677,7 +11697,7 @@
                 <a:ea typeface="Malgun Gothic" pitchFamily="34" charset="-122"/>
                 <a:cs typeface="Malgun Gothic" pitchFamily="34" charset="-120"/>
               </a:rPr>
-              <a:t>손바닥이 정면일 때만 클릭 판정. 0.1초 이상 유지해야 인정.</a:t>
+              <a:t>손바닥이 정면일 때만 클릭 판정</a:t>
             </a:r>
             <a:endParaRPr lang="en-US" sz="1400" dirty="0"/>
           </a:p>
@@ -11766,7 +11786,7 @@
                 <a:ea typeface="Malgun Gothic" pitchFamily="34" charset="-122"/>
                 <a:cs typeface="Malgun Gothic" pitchFamily="34" charset="-120"/>
               </a:rPr>
-              <a:t>거리 영향은 정규화로 제거. 손날 판정은 들어가는 기준과 나오는 기준을 다르게 둬서 깜빡임을 막음.</a:t>
+              <a:t>거리 영향은 정규화로 제거. 손날 판정은 들어가는 기준과 나오는 기준을 다르게 두어 깜빡임 방지</a:t>
             </a:r>
             <a:endParaRPr lang="en-US" sz="1400" dirty="0"/>
           </a:p>
@@ -12509,7 +12529,7 @@
                 <a:ea typeface="Malgun Gothic" pitchFamily="34" charset="-122"/>
                 <a:cs typeface="Malgun Gothic" pitchFamily="34" charset="-120"/>
               </a:rPr>
-              <a:t>코드 수정 없이 제스처에 원하는 명령을 연결해 보고 싶어서. 인식은 코드가, 문장 해석은 LLM이 맡는다.</a:t>
+              <a:t>코드 수정 없이 제스처에 원하는 명령을 연결하려는 목적. 인식은 코드가, 문장 해석은 LLM이 담당</a:t>
             </a:r>
             <a:endParaRPr lang="en-US" sz="1500" dirty="0"/>
           </a:p>
@@ -12619,7 +12639,7 @@
                 <a:ea typeface="Malgun Gothic" pitchFamily="34" charset="-122"/>
                 <a:cs typeface="Malgun Gothic" pitchFamily="34" charset="-120"/>
               </a:rPr>
-              <a:t>모니터 끄기로 해석</a:t>
+              <a:t>모니터 끄기로 오해석</a:t>
             </a:r>
             <a:endParaRPr lang="en-US" sz="1600" dirty="0"/>
           </a:p>
@@ -12807,7 +12827,7 @@
                 <a:ea typeface="Malgun Gothic" pitchFamily="34" charset="-122"/>
                 <a:cs typeface="Malgun Gothic" pitchFamily="34" charset="-120"/>
               </a:rPr>
-              <a:t>없는 동작을</a:t>
+              <a:t>없는 동작</a:t>
             </a:r>
             <a:endParaRPr lang="en-US" sz="1600" dirty="0"/>
           </a:p>
@@ -12824,7 +12844,7 @@
                 <a:ea typeface="Malgun Gothic" pitchFamily="34" charset="-122"/>
                 <a:cs typeface="Malgun Gothic" pitchFamily="34" charset="-120"/>
               </a:rPr>
-              <a:t>만들어 냄</a:t>
+              <a:t>임의 생성</a:t>
             </a:r>
             <a:endParaRPr lang="en-US" sz="1600" dirty="0"/>
           </a:p>
@@ -13012,7 +13032,7 @@
                 <a:ea typeface="Malgun Gothic" pitchFamily="34" charset="-122"/>
                 <a:cs typeface="Malgun Gothic" pitchFamily="34" charset="-120"/>
               </a:rPr>
-              <a:t>응답 지연 예외로</a:t>
+              <a:t>응답 지연 시</a:t>
             </a:r>
             <a:endParaRPr lang="en-US" sz="1600" dirty="0"/>
           </a:p>
